--- a/plans/ppt/TW-SELFSELECT台股買賣自動化系統-W5-講稿版.pptx
+++ b/plans/ppt/TW-SELFSELECT台股買賣自動化系統-W5-講稿版.pptx
@@ -657,7 +657,7 @@
           </a:p>
           <a:p>
             <a:r>
-              <a:t>前四週，我們認識了系統、學會了用 Opencode、也把五大策略的原理搞懂了。這一週是動手週——我們要實際把策略拿去「回測」，用歷史數據驗證策略到底會不會賺錢。</a:t>
+              <a:t>前四週，我們認識了系統、學會了用 DSH、也把五大策略的原理搞懂了。這一週是動手週——我們要實際把策略拿去「回測」，用歷史數據驗證策略到底會不會賺錢。</a:t>
             </a:r>
           </a:p>
           <a:p>
@@ -1215,7 +1215,7 @@
           <a:p/>
           <a:p>
             <a:r>
-              <a:t>再問 Opencode：聯發科 2024 到 2025，四策略表現如何？哪幾個區段適合用唐奇安通道？</a:t>
+              <a:t>再問 DSH：聯發科 2024 到 2025，四策略表現如何？哪幾個區段適合用唐奇安通道？</a:t>
             </a:r>
           </a:p>
           <a:p>
@@ -1593,12 +1593,12 @@
           <a:p/>
           <a:p>
             <a:r>
-              <a:t>計畫好了，切回 UltraWorker 執行。</a:t>
-            </a:r>
-          </a:p>
-          <a:p>
-            <a:r>
-              <a:t>輸入「執行 weekly-kd-strategy」就會開始動工。提醒一點：如果執行太久，可以用 ESC 中斷，切到 Deepseek Pro 讓它跑得更快——複雜任務換更強模型是合理的。</a:t>
+              <a:t>確認計畫後開始執行</a:t>
+            </a:r>
+          </a:p>
+          <a:p>
+            <a:r>
+              <a:t>輸入「執行 weekly-kd-strategy」就會開始動工。提醒一點：如果執行太久，可以用 ESC 中斷，換成更大的模型續跑——複雜任務換更強模型是合理的。</a:t>
             </a:r>
           </a:p>
           <a:p>
@@ -1609,7 +1609,7 @@
           <a:p/>
           <a:p>
             <a:r>
-              <a:t>【講師提示】強調「規劃用 Plan Builder、執行用 UltraWorker、複雜任務可升級 Pro」的分工。</a:t>
+              <a:t>【講師提示】強調「先 plan（規劃）再執行」——DSH 的 plan 模式會先把計畫送給你看，確認後才動手；複雜任務可換更大模型續跑。</a:t>
             </a:r>
           </a:p>
         </p:txBody>
@@ -3326,7 +3326,7 @@
           </a:p>
           <a:p>
             <a:r>
-              <a:t>我問 Opencode：「給我台積電今年一到六月，用策略一到四回測單筆投資五十萬的結果。」</a:t>
+              <a:t>我問 DSH：「給我台積電今年一到六月，用策略一到四回測單筆投資五十萬的結果。」</a:t>
             </a:r>
           </a:p>
           <a:p>
@@ -15367,7 +15367,7 @@
                 <a:uFillTx/>
                 <a:latin typeface="Century Gothic"/>
               </a:rPr>
-              <a:t>使用</a:t>
+              <a:t>使用 Python 與 DSH</a:t>
             </a:r>
             <a:r>
               <a:rPr lang="en-US" sz="2400" b="0" u="none" strike="noStrike">
@@ -15381,7 +15381,7 @@
                 <a:uFillTx/>
                 <a:latin typeface="Century Gothic"/>
               </a:rPr>
-              <a:t>Python</a:t>
+              <a:t/>
             </a:r>
             <a:r>
               <a:rPr lang="zh-TW" sz="2400" b="0" u="none" strike="noStrike">
@@ -15395,7 +15395,7 @@
                 <a:uFillTx/>
                 <a:latin typeface="Century Gothic"/>
               </a:rPr>
-              <a:t>與</a:t>
+              <a:t/>
             </a:r>
             <a:r>
               <a:rPr lang="en-US" sz="2400" b="0" u="none" strike="noStrike">
@@ -15409,7 +15409,7 @@
                 <a:uFillTx/>
                 <a:latin typeface="Century Gothic"/>
               </a:rPr>
-              <a:t>Opencode AI</a:t>
+              <a:t/>
             </a:r>
           </a:p>
         </p:txBody>
@@ -20606,7 +20606,7 @@
                 <a:uFillTx/>
                 <a:latin typeface="Century Gothic"/>
               </a:rPr>
-              <a:t>計畫好了，切回</a:t>
+              <a:t>確認計畫後開始執行</a:t>
             </a:r>
             <a:r>
               <a:rPr lang="en-US" sz="2400" b="1" u="none" strike="noStrike">
@@ -20620,7 +20620,7 @@
                 <a:uFillTx/>
                 <a:latin typeface="Century Gothic"/>
               </a:rPr>
-              <a:t>UltraWorker</a:t>
+              <a:t/>
             </a:r>
             <a:r>
               <a:rPr lang="zh-TW" sz="2400" b="1" u="none" strike="noStrike">
@@ -20634,7 +20634,7 @@
                 <a:uFillTx/>
                 <a:latin typeface="Century Gothic"/>
               </a:rPr>
-              <a:t>執行＝＞</a:t>
+              <a:t/>
             </a:r>
             <a:br>
               <a:rPr sz="2400"/>
@@ -20651,7 +20651,7 @@
                 <a:uFillTx/>
                 <a:latin typeface="Century Gothic"/>
               </a:rPr>
-              <a:t>輸入：執行</a:t>
+              <a:t/>
             </a:r>
             <a:r>
               <a:rPr lang="en-US" sz="2400" b="1" u="none" strike="noStrike">
@@ -20665,7 +20665,7 @@
                 <a:uFillTx/>
                 <a:latin typeface="Century Gothic"/>
               </a:rPr>
-              <a:t>weekly-kd-strategy</a:t>
+              <a:t/>
             </a:r>
             <a:r>
               <a:rPr lang="zh-TW" sz="2400" b="1" u="none" strike="noStrike">
@@ -20679,7 +20679,7 @@
                 <a:uFillTx/>
                 <a:latin typeface="Century Gothic"/>
               </a:rPr>
-              <a:t>（執行太久，可以ＥＳＣ中斷切</a:t>
+              <a:t/>
             </a:r>
             <a:r>
               <a:rPr lang="en-US" sz="2400" b="1" u="none" strike="noStrike">
@@ -20693,7 +20693,7 @@
                 <a:uFillTx/>
                 <a:latin typeface="Century Gothic"/>
               </a:rPr>
-              <a:t>Deepseek Pro)</a:t>
+              <a:t/>
             </a:r>
           </a:p>
         </p:txBody>

--- a/plans/ppt/TW-SELFSELECT台股買賣自動化系統-W5-講稿版.pptx
+++ b/plans/ppt/TW-SELFSELECT台股買賣自動化系統-W5-講稿版.pptx
@@ -1409,7 +1409,7 @@
           </a:p>
           <a:p>
             <a:r>
-              <a:t>先切到 Plan Builder 模式，然後輸入需求：「用備用二來完成週 KD 策略」。這個策略來自 Google AI 推薦的穩健 KD 策略：放棄震盪劇烈的日線，改用週 K 線——以週為單位計算。週 KD 的轉折代表的是中長期趨勢改變，涵蓋數個月到半年以上。</a:t>
+              <a:t>先切到 plan 模式，然後輸入需求：「用備用二來完成週 KD 策略」。這個策略來自 Google AI 推薦的穩健 KD 策略：放棄震盪劇烈的日線，改用週 K 線——以週為單位計算。週 KD 的轉折代表的是中長期趨勢改變，涵蓋數個月到半年以上。</a:t>
             </a:r>
           </a:p>
           <a:p>
@@ -1425,7 +1425,7 @@
           <a:p/>
           <a:p>
             <a:r>
-              <a:t>【講師提示】示範「用 Plan Builder 規劃新策略」的完整流程，強調 AI 會自動產生計畫。</a:t>
+              <a:t>【講師提示】示範「用 plan 模式規劃新策略」的完整流程，強調 AI 會自動產生計畫。</a:t>
             </a:r>
           </a:p>
         </p:txBody>
@@ -1501,12 +1501,12 @@
           <a:p/>
           <a:p>
             <a:r>
-              <a:t>這頁是 Plan Builder 的計畫完成畫面。</a:t>
-            </a:r>
-          </a:p>
-          <a:p>
-            <a:r>
-              <a:t>大家看畫面——Plan Builder 已經把「週 KD 策略」拆解成完整的工作計畫，放在 .omo/plans 底下的 Markdown 檔。計畫裡包含要做什麼、改哪些檔案、怎麼驗證。這就是「先規劃再執行」的標準流程。</a:t>
+              <a:t>這頁是 plan 模式的計畫完成畫面。</a:t>
+            </a:r>
+          </a:p>
+          <a:p>
+            <a:r>
+              <a:t>大家看畫面——DSH 已經把「週 KD 策略」拆解成完整的工作計畫（Markdown），確認後才開始改檔。計畫裡包含要做什麼、改哪些檔案、怎麼驗證。這就是「先規劃再執行」的標準流程。</a:t>
             </a:r>
           </a:p>
           <a:p>
@@ -19814,535 +19814,33 @@
               </a:tabLst>
             </a:pPr>
             <a:r>
-              <a:rPr lang="zh-TW" sz="2800" b="1" u="none" strike="noStrike">
-                <a:solidFill>
-                  <a:schemeClr val="dk1">
-                    <a:lumMod val="85000"/>
-                    <a:lumOff val="15000"/>
-                  </a:schemeClr>
-                </a:solidFill>
-                <a:effectLst/>
-                <a:highlight>
-                  <a:srgbClr val="FFFF00"/>
-                </a:highlight>
-                <a:uFillTx/>
-                <a:latin typeface="Century Gothic"/>
-              </a:rPr>
-              <a:t>增加策略</a:t>
-            </a:r>
-            <a:r>
-              <a:rPr lang="zh-TW" sz="2800" b="1" u="none" strike="noStrike">
-                <a:solidFill>
-                  <a:schemeClr val="dk1">
-                    <a:lumMod val="85000"/>
-                    <a:lumOff val="15000"/>
-                  </a:schemeClr>
-                </a:solidFill>
-                <a:effectLst/>
-                <a:uFillTx/>
-                <a:latin typeface="Century Gothic"/>
-              </a:rPr>
-              <a:t>＝＞（先切到</a:t>
-            </a:r>
-            <a:r>
-              <a:rPr lang="en-US" sz="2800" b="1" u="none" strike="noStrike">
-                <a:solidFill>
-                  <a:schemeClr val="dk1">
-                    <a:lumMod val="85000"/>
-                    <a:lumOff val="15000"/>
-                  </a:schemeClr>
-                </a:solidFill>
-                <a:effectLst/>
-                <a:uFillTx/>
-                <a:latin typeface="Century Gothic"/>
-              </a:rPr>
-              <a:t>Plan Builder)</a:t>
-            </a:r>
-            <a:br>
-              <a:rPr sz="2800"/>
-            </a:br>
-            <a:br>
-              <a:rPr sz="2800"/>
-            </a:br>
-            <a:r>
-              <a:rPr lang="zh-TW" sz="2800" b="1" u="none" strike="noStrike">
-                <a:solidFill>
-                  <a:schemeClr val="dk1">
-                    <a:lumMod val="85000"/>
-                    <a:lumOff val="15000"/>
-                  </a:schemeClr>
-                </a:solidFill>
-                <a:effectLst/>
-                <a:uFillTx/>
-                <a:latin typeface="Century Gothic"/>
-              </a:rPr>
-              <a:t>問：</a:t>
-            </a:r>
-            <a:r>
-              <a:rPr lang="zh-TW" sz="2800" b="0" u="none" strike="noStrike">
-                <a:solidFill>
-                  <a:schemeClr val="dk1">
-                    <a:lumMod val="85000"/>
-                    <a:lumOff val="15000"/>
-                  </a:schemeClr>
-                </a:solidFill>
-                <a:effectLst/>
-                <a:uFillTx/>
-                <a:latin typeface="Century Gothic"/>
-              </a:rPr>
-              <a:t>用</a:t>
-            </a:r>
-            <a:r>
-              <a:rPr lang="en-US" sz="2800" b="0" u="none" strike="noStrike">
-                <a:solidFill>
-                  <a:schemeClr val="dk1">
-                    <a:lumMod val="85000"/>
-                    <a:lumOff val="15000"/>
-                  </a:schemeClr>
-                </a:solidFill>
-                <a:effectLst/>
-                <a:uFillTx/>
-                <a:latin typeface="Century Gothic"/>
-              </a:rPr>
-              <a:t>g1</a:t>
-            </a:r>
-            <a:r>
-              <a:rPr lang="zh-TW" sz="2800" b="0" u="none" strike="noStrike">
-                <a:solidFill>
-                  <a:schemeClr val="dk1">
-                    <a:lumMod val="85000"/>
-                    <a:lumOff val="15000"/>
-                  </a:schemeClr>
-                </a:solidFill>
-                <a:effectLst/>
-                <a:uFillTx/>
-                <a:latin typeface="Century Gothic"/>
-              </a:rPr>
-              <a:t>備用</a:t>
-            </a:r>
-            <a:r>
-              <a:rPr lang="en-US" sz="2800" b="0" u="none" strike="noStrike">
-                <a:solidFill>
-                  <a:schemeClr val="dk1">
-                    <a:lumMod val="85000"/>
-                    <a:lumOff val="15000"/>
-                  </a:schemeClr>
-                </a:solidFill>
-                <a:effectLst/>
-                <a:uFillTx/>
-                <a:latin typeface="Century Gothic"/>
-              </a:rPr>
-              <a:t>2</a:t>
-            </a:r>
-            <a:r>
-              <a:rPr lang="zh-TW" sz="2800" b="0" u="none" strike="noStrike">
-                <a:solidFill>
-                  <a:schemeClr val="dk1">
-                    <a:lumMod val="85000"/>
-                    <a:lumOff val="15000"/>
-                  </a:schemeClr>
-                </a:solidFill>
-                <a:effectLst/>
-                <a:uFillTx/>
-                <a:latin typeface="Century Gothic"/>
-              </a:rPr>
-              <a:t>來完成以下</a:t>
-            </a:r>
-            <a:r>
-              <a:rPr lang="en-US" sz="2800" b="0" u="none" strike="noStrike">
-                <a:solidFill>
-                  <a:schemeClr val="dk1">
-                    <a:lumMod val="85000"/>
-                    <a:lumOff val="15000"/>
-                  </a:schemeClr>
-                </a:solidFill>
-                <a:effectLst/>
-                <a:uFillTx/>
-                <a:latin typeface="Century Gothic"/>
-              </a:rPr>
-              <a:t>KD</a:t>
-            </a:r>
-            <a:r>
-              <a:rPr lang="zh-TW" sz="2800" b="0" u="none" strike="noStrike">
-                <a:solidFill>
-                  <a:schemeClr val="dk1">
-                    <a:lumMod val="85000"/>
-                    <a:lumOff val="15000"/>
-                  </a:schemeClr>
-                </a:solidFill>
-                <a:effectLst/>
-                <a:uFillTx/>
-                <a:latin typeface="Century Gothic"/>
-              </a:rPr>
-              <a:t>策略</a:t>
-            </a:r>
-            <a:r>
-              <a:rPr lang="en-US" sz="2800" b="0" u="none" strike="noStrike">
-                <a:solidFill>
-                  <a:schemeClr val="dk1">
-                    <a:lumMod val="85000"/>
-                    <a:lumOff val="15000"/>
-                  </a:schemeClr>
-                </a:solidFill>
-                <a:effectLst/>
-                <a:uFillTx/>
-                <a:latin typeface="Century Gothic"/>
-              </a:rPr>
-              <a:t>: </a:t>
-            </a:r>
-            <a:r>
-              <a:rPr lang="zh-TW" sz="2800" b="0" u="none" strike="noStrike">
-                <a:solidFill>
-                  <a:schemeClr val="dk1">
-                    <a:lumMod val="85000"/>
-                    <a:lumOff val="15000"/>
-                  </a:schemeClr>
-                </a:solidFill>
-                <a:effectLst/>
-                <a:uFillTx/>
-                <a:latin typeface="Century Gothic"/>
-              </a:rPr>
-              <a:t>週 </a:t>
-            </a:r>
-            <a:r>
-              <a:rPr lang="en-US" sz="2800" b="0" u="none" strike="noStrike">
-                <a:solidFill>
-                  <a:schemeClr val="dk1">
-                    <a:lumMod val="85000"/>
-                    <a:lumOff val="15000"/>
-                  </a:schemeClr>
-                </a:solidFill>
-                <a:effectLst/>
-                <a:uFillTx/>
-                <a:latin typeface="Century Gothic"/>
-              </a:rPr>
-              <a:t>KD </a:t>
-            </a:r>
-            <a:r>
-              <a:rPr lang="zh-TW" sz="2800" b="0" u="none" strike="noStrike">
-                <a:solidFill>
-                  <a:schemeClr val="dk1">
-                    <a:lumMod val="85000"/>
-                    <a:lumOff val="15000"/>
-                  </a:schemeClr>
-                </a:solidFill>
-                <a:effectLst/>
-                <a:uFillTx/>
-                <a:latin typeface="Century Gothic"/>
-              </a:rPr>
-              <a:t>黃金交叉策略（最推薦來自</a:t>
-            </a:r>
-            <a:r>
-              <a:rPr lang="en-US" sz="2800" b="0" u="none" strike="noStrike">
-                <a:solidFill>
-                  <a:schemeClr val="dk1">
-                    <a:lumMod val="85000"/>
-                    <a:lumOff val="15000"/>
-                  </a:schemeClr>
-                </a:solidFill>
-                <a:effectLst/>
-                <a:uFillTx/>
-                <a:latin typeface="Century Gothic"/>
-              </a:rPr>
-              <a:t>Google AI</a:t>
-            </a:r>
-            <a:r>
-              <a:rPr lang="zh-TW" sz="2800" b="0" u="none" strike="noStrike">
-                <a:solidFill>
-                  <a:schemeClr val="dk1">
-                    <a:lumMod val="85000"/>
-                    <a:lumOff val="15000"/>
-                  </a:schemeClr>
-                </a:solidFill>
-                <a:effectLst/>
-                <a:uFillTx/>
-                <a:latin typeface="Century Gothic"/>
-              </a:rPr>
-              <a:t>推薦穩健的ＫＤ策略）</a:t>
-            </a:r>
-            <a:r>
-              <a:rPr lang="en-US" sz="2800" b="0" u="none" strike="noStrike">
-                <a:solidFill>
-                  <a:schemeClr val="dk1">
-                    <a:lumMod val="85000"/>
-                    <a:lumOff val="15000"/>
-                  </a:schemeClr>
-                </a:solidFill>
-                <a:effectLst/>
-                <a:uFillTx/>
-                <a:latin typeface="Century Gothic"/>
-              </a:rPr>
-              <a:t>: </a:t>
-            </a:r>
-            <a:br>
-              <a:rPr sz="2800"/>
-            </a:br>
-            <a:br>
-              <a:rPr sz="2800"/>
-            </a:br>
-            <a:r>
-              <a:rPr lang="zh-TW" sz="2800" b="0" u="none" strike="noStrike">
-                <a:solidFill>
-                  <a:schemeClr val="dk1">
-                    <a:lumMod val="85000"/>
-                    <a:lumOff val="15000"/>
-                  </a:schemeClr>
-                </a:solidFill>
-                <a:effectLst/>
-                <a:uFillTx/>
-                <a:latin typeface="Century Gothic"/>
-              </a:rPr>
-              <a:t>放棄震盪劇烈的日線，改用 週 </a:t>
-            </a:r>
-            <a:r>
-              <a:rPr lang="en-US" sz="2800" b="0" u="none" strike="noStrike">
-                <a:solidFill>
-                  <a:schemeClr val="dk1">
-                    <a:lumMod val="85000"/>
-                    <a:lumOff val="15000"/>
-                  </a:schemeClr>
-                </a:solidFill>
-                <a:effectLst/>
-                <a:uFillTx/>
-                <a:latin typeface="Century Gothic"/>
-              </a:rPr>
-              <a:t>K </a:t>
-            </a:r>
-            <a:r>
-              <a:rPr lang="zh-TW" sz="2800" b="0" u="none" strike="noStrike">
-                <a:solidFill>
-                  <a:schemeClr val="dk1">
-                    <a:lumMod val="85000"/>
-                    <a:lumOff val="15000"/>
-                  </a:schemeClr>
-                </a:solidFill>
-                <a:effectLst/>
-                <a:uFillTx/>
-                <a:latin typeface="Century Gothic"/>
-              </a:rPr>
-              <a:t>線（以週為單位計算）。</a:t>
-            </a:r>
-            <a:br>
-              <a:rPr sz="2800"/>
-            </a:br>
-            <a:r>
-              <a:rPr lang="en-US" sz="2800" b="0" u="none" strike="noStrike">
-                <a:solidFill>
-                  <a:schemeClr val="dk1">
-                    <a:lumMod val="85000"/>
-                    <a:lumOff val="15000"/>
-                  </a:schemeClr>
-                </a:solidFill>
-                <a:effectLst/>
-                <a:uFillTx/>
-                <a:latin typeface="Century Gothic"/>
-              </a:rPr>
-              <a:t> 週 KD </a:t>
-            </a:r>
-            <a:r>
-              <a:rPr lang="zh-TW" sz="2800" b="0" u="none" strike="noStrike">
-                <a:solidFill>
-                  <a:schemeClr val="dk1">
-                    <a:lumMod val="85000"/>
-                    <a:lumOff val="15000"/>
-                  </a:schemeClr>
-                </a:solidFill>
-                <a:effectLst/>
-                <a:uFillTx/>
-                <a:latin typeface="Century Gothic"/>
-              </a:rPr>
-              <a:t>的轉折代表的是中長期（數個月到半年以上）的趨勢改變。 </a:t>
-            </a:r>
-            <a:br>
-              <a:rPr sz="2800"/>
-            </a:br>
-            <a:r>
-              <a:rPr lang="zh-TW" sz="2800" b="0" u="none" strike="noStrike">
-                <a:solidFill>
-                  <a:schemeClr val="dk1">
-                    <a:lumMod val="85000"/>
-                    <a:lumOff val="15000"/>
-                  </a:schemeClr>
-                </a:solidFill>
-                <a:effectLst/>
-                <a:uFillTx/>
-                <a:latin typeface="Century Gothic"/>
-              </a:rPr>
-              <a:t>買進點：當週 </a:t>
-            </a:r>
-            <a:r>
-              <a:rPr lang="en-US" sz="2800" b="0" u="none" strike="noStrike">
-                <a:solidFill>
-                  <a:schemeClr val="dk1">
-                    <a:lumMod val="85000"/>
-                    <a:lumOff val="15000"/>
-                  </a:schemeClr>
-                </a:solidFill>
-                <a:effectLst/>
-                <a:uFillTx/>
-                <a:latin typeface="Century Gothic"/>
-              </a:rPr>
-              <a:t>KD </a:t>
-            </a:r>
-            <a:r>
-              <a:rPr lang="zh-TW" sz="2800" b="0" u="none" strike="noStrike">
-                <a:solidFill>
-                  <a:schemeClr val="dk1">
-                    <a:lumMod val="85000"/>
-                    <a:lumOff val="15000"/>
-                  </a:schemeClr>
-                </a:solidFill>
-                <a:effectLst/>
-                <a:uFillTx/>
-                <a:latin typeface="Century Gothic"/>
-              </a:rPr>
-              <a:t>在 低檔（小於 </a:t>
-            </a:r>
-            <a:r>
-              <a:rPr lang="en-US" sz="2800" b="0" u="none" strike="noStrike">
-                <a:solidFill>
-                  <a:schemeClr val="dk1">
-                    <a:lumMod val="85000"/>
-                    <a:lumOff val="15000"/>
-                  </a:schemeClr>
-                </a:solidFill>
-                <a:effectLst/>
-                <a:uFillTx/>
-                <a:latin typeface="Century Gothic"/>
-              </a:rPr>
-              <a:t>30 </a:t>
-            </a:r>
-            <a:r>
-              <a:rPr lang="zh-TW" sz="2800" b="0" u="none" strike="noStrike">
-                <a:solidFill>
-                  <a:schemeClr val="dk1">
-                    <a:lumMod val="85000"/>
-                    <a:lumOff val="15000"/>
-                  </a:schemeClr>
-                </a:solidFill>
-                <a:effectLst/>
-                <a:uFillTx/>
-                <a:latin typeface="Century Gothic"/>
-              </a:rPr>
-              <a:t>或 </a:t>
-            </a:r>
-            <a:r>
-              <a:rPr lang="en-US" sz="2800" b="0" u="none" strike="noStrike">
-                <a:solidFill>
-                  <a:schemeClr val="dk1">
-                    <a:lumMod val="85000"/>
-                    <a:lumOff val="15000"/>
-                  </a:schemeClr>
-                </a:solidFill>
-                <a:effectLst/>
-                <a:uFillTx/>
-                <a:latin typeface="Century Gothic"/>
-              </a:rPr>
-              <a:t>20</a:t>
-            </a:r>
-            <a:r>
-              <a:rPr lang="zh-TW" sz="2800" b="0" u="none" strike="noStrike">
-                <a:solidFill>
-                  <a:schemeClr val="dk1">
-                    <a:lumMod val="85000"/>
-                    <a:lumOff val="15000"/>
-                  </a:schemeClr>
-                </a:solidFill>
-                <a:effectLst/>
-                <a:uFillTx/>
-                <a:latin typeface="Century Gothic"/>
-              </a:rPr>
-              <a:t>）發生黃金交叉 時進場。這通常代表股價經歷大波段修正後，中長期底部成形。</a:t>
-            </a:r>
-            <a:br>
-              <a:rPr sz="2800"/>
-            </a:br>
-            <a:r>
-              <a:rPr lang="zh-TW" sz="2800" b="0" u="none" strike="noStrike">
-                <a:solidFill>
-                  <a:schemeClr val="dk1">
-                    <a:lumMod val="85000"/>
-                    <a:lumOff val="15000"/>
-                  </a:schemeClr>
-                </a:solidFill>
-                <a:effectLst/>
-                <a:uFillTx/>
-                <a:latin typeface="Century Gothic"/>
-              </a:rPr>
-              <a:t>持有期：只要週 </a:t>
-            </a:r>
-            <a:r>
-              <a:rPr lang="en-US" sz="2800" b="0" u="none" strike="noStrike">
-                <a:solidFill>
-                  <a:schemeClr val="dk1">
-                    <a:lumMod val="85000"/>
-                    <a:lumOff val="15000"/>
-                  </a:schemeClr>
-                </a:solidFill>
-                <a:effectLst/>
-                <a:uFillTx/>
-                <a:latin typeface="Century Gothic"/>
-              </a:rPr>
-              <a:t>KD </a:t>
-            </a:r>
-            <a:r>
-              <a:rPr lang="zh-TW" sz="2800" b="0" u="none" strike="noStrike">
-                <a:solidFill>
-                  <a:schemeClr val="dk1">
-                    <a:lumMod val="85000"/>
-                    <a:lumOff val="15000"/>
-                  </a:schemeClr>
-                </a:solidFill>
-                <a:effectLst/>
-                <a:uFillTx/>
-                <a:latin typeface="Century Gothic"/>
-              </a:rPr>
-              <a:t>維持向上，或是維持在高檔鈍化，就一路抱牢。</a:t>
-            </a:r>
-            <a:br>
-              <a:rPr sz="2800"/>
-            </a:br>
-            <a:r>
-              <a:rPr lang="zh-TW" sz="2800" b="0" u="none" strike="noStrike">
-                <a:solidFill>
-                  <a:schemeClr val="dk1">
-                    <a:lumMod val="85000"/>
-                    <a:lumOff val="15000"/>
-                  </a:schemeClr>
-                </a:solidFill>
-                <a:effectLst/>
-                <a:uFillTx/>
-                <a:latin typeface="Century Gothic"/>
-              </a:rPr>
-              <a:t>好處：一年中一檔股票可能只會出現 </a:t>
-            </a:r>
-            <a:r>
-              <a:rPr lang="en-US" sz="2800" b="0" u="none" strike="noStrike">
-                <a:solidFill>
-                  <a:schemeClr val="dk1">
-                    <a:lumMod val="85000"/>
-                    <a:lumOff val="15000"/>
-                  </a:schemeClr>
-                </a:solidFill>
-                <a:effectLst/>
-                <a:uFillTx/>
-                <a:latin typeface="Century Gothic"/>
-              </a:rPr>
-              <a:t>1~2 </a:t>
-            </a:r>
-            <a:r>
-              <a:rPr lang="zh-TW" sz="2800" b="0" u="none" strike="noStrike">
-                <a:solidFill>
-                  <a:schemeClr val="dk1">
-                    <a:lumMod val="85000"/>
-                    <a:lumOff val="15000"/>
-                  </a:schemeClr>
-                </a:solidFill>
-                <a:effectLst/>
-                <a:uFillTx/>
-                <a:latin typeface="Century Gothic"/>
-              </a:rPr>
-              <a:t>次訊號，交易次數少，手續費低，且能抓到大波段波幅。</a:t>
+              <a:t>增加策略＝＞（先切到 plan 模式)</a:t>
+            </a:r>
+            <a:br/>
+            <a:br/>
+            <a:r>
+              <a:t>問：用g1備用2來完成以下KD策略: 週 KD 黃金交叉策略（最推薦來自Google AI推薦穩健的ＫＤ策略）: </a:t>
+            </a:r>
+            <a:br/>
+            <a:br/>
+            <a:r>
+              <a:t>放棄震盪劇烈的日線，改用 週 K 線（以週為單位計算）。</a:t>
+            </a:r>
+            <a:br/>
+            <a:r>
+              <a:t> 週 KD 的轉折代表的是中長期（數個月到半年以上）的趨勢改變。 </a:t>
+            </a:r>
+            <a:br/>
+            <a:r>
+              <a:t>買進點：當週 KD 在 低檔（小於 30 或 20）發生黃金交叉 時進場。這通常代表股價經歷大波段修正後，中長期底部成形。</a:t>
+            </a:r>
+            <a:br/>
+            <a:r>
+              <a:t>持有期：只要週 KD 維持向上，或是維持在高檔鈍化，就一路抱牢。</a:t>
+            </a:r>
+            <a:br/>
+            <a:r>
+              <a:t>好處：一年中一檔股票可能只會出現 1~2 次訊號，交易次數少，手續費低，且能抓到大波段波幅。</a:t>
             </a:r>
             <a:endParaRPr lang="en-US" sz="2800" b="1" u="none" strike="noStrike">
               <a:solidFill>
@@ -20444,32 +19942,7 @@
               </a:tabLst>
             </a:pPr>
             <a:r>
-              <a:rPr lang="en-US" sz="3200" b="1" u="none" strike="noStrike">
-                <a:solidFill>
-                  <a:schemeClr val="dk1">
-                    <a:lumMod val="85000"/>
-                    <a:lumOff val="15000"/>
-                  </a:schemeClr>
-                </a:solidFill>
-                <a:effectLst/>
-                <a:uFillTx/>
-                <a:latin typeface="Century Gothic"/>
-              </a:rPr>
-              <a:t>Plan Builder</a:t>
-            </a:r>
-            <a:r>
-              <a:rPr lang="zh-TW" sz="3200" b="1" u="none" strike="noStrike">
-                <a:solidFill>
-                  <a:schemeClr val="dk1">
-                    <a:lumMod val="85000"/>
-                    <a:lumOff val="15000"/>
-                  </a:schemeClr>
-                </a:solidFill>
-                <a:effectLst/>
-                <a:uFillTx/>
-                <a:latin typeface="Century Gothic"/>
-              </a:rPr>
-              <a:t>計畫完成</a:t>
+              <a:t>計畫完成（plan 模式）</a:t>
             </a:r>
             <a:endParaRPr lang="en-US" sz="3200" b="1" u="none" strike="noStrike">
               <a:solidFill>
@@ -20485,30 +19958,6 @@
           </a:p>
         </p:txBody>
       </p:sp>
-      <p:pic>
-        <p:nvPicPr>
-          <p:cNvPr id="143" name="內容版面配置區 5"/>
-          <p:cNvPicPr/>
-          <p:nvPr/>
-        </p:nvPicPr>
-        <p:blipFill>
-          <a:blip r:embed="rId2"/>
-          <a:stretch/>
-        </p:blipFill>
-        <p:spPr>
-          <a:xfrm>
-            <a:off x="1293840" y="1523880"/>
-            <a:ext cx="8821080" cy="4476960"/>
-          </a:xfrm>
-          <a:prstGeom prst="rect">
-            <a:avLst/>
-          </a:prstGeom>
-          <a:noFill/>
-          <a:ln w="0">
-            <a:noFill/>
-          </a:ln>
-        </p:spPr>
-      </p:pic>
       <p:sp>
         <p:nvSpPr>
           <p:cNvPr id="3" name="PlaceHolder 2"/>
@@ -20531,6 +19980,30 @@
           </a:p>
         </p:txBody>
       </p:sp>
+      <p:pic>
+        <p:nvPicPr>
+          <p:cNvPr id="143" name="Picture 142" descr="tmpa99ntt1i.png"/>
+          <p:cNvPicPr>
+            <a:picLocks noChangeAspect="1"/>
+          </p:cNvPicPr>
+          <p:nvPr/>
+        </p:nvPicPr>
+        <p:blipFill>
+          <a:blip r:embed="rId4"/>
+          <a:stretch>
+            <a:fillRect/>
+          </a:stretch>
+        </p:blipFill>
+        <p:spPr>
+          <a:xfrm>
+            <a:off x="1293840" y="1523880"/>
+            <a:ext cx="8821080" cy="4159465"/>
+          </a:xfrm>
+          <a:prstGeom prst="rect">
+            <a:avLst/>
+          </a:prstGeom>
+        </p:spPr>
+      </p:pic>
     </p:spTree>
   </p:cSld>
   <p:clrMapOvr>
@@ -20698,30 +20171,6 @@
           </a:p>
         </p:txBody>
       </p:sp>
-      <p:pic>
-        <p:nvPicPr>
-          <p:cNvPr id="145" name="內容版面配置區 7"/>
-          <p:cNvPicPr/>
-          <p:nvPr/>
-        </p:nvPicPr>
-        <p:blipFill>
-          <a:blip r:embed="rId2"/>
-          <a:stretch/>
-        </p:blipFill>
-        <p:spPr>
-          <a:xfrm>
-            <a:off x="1411560" y="1371600"/>
-            <a:ext cx="9458640" cy="5180760"/>
-          </a:xfrm>
-          <a:prstGeom prst="rect">
-            <a:avLst/>
-          </a:prstGeom>
-          <a:noFill/>
-          <a:ln w="0">
-            <a:noFill/>
-          </a:ln>
-        </p:spPr>
-      </p:pic>
       <p:sp>
         <p:nvSpPr>
           <p:cNvPr id="3" name="PlaceHolder 2"/>
@@ -20744,6 +20193,30 @@
           </a:p>
         </p:txBody>
       </p:sp>
+      <p:pic>
+        <p:nvPicPr>
+          <p:cNvPr id="145" name="Picture 144" descr="tmpbhf1jk84.png"/>
+          <p:cNvPicPr>
+            <a:picLocks noChangeAspect="1"/>
+          </p:cNvPicPr>
+          <p:nvPr/>
+        </p:nvPicPr>
+        <p:blipFill>
+          <a:blip r:embed="rId4"/>
+          <a:stretch>
+            <a:fillRect/>
+          </a:stretch>
+        </p:blipFill>
+        <p:spPr>
+          <a:xfrm>
+            <a:off x="1411560" y="1371600"/>
+            <a:ext cx="9458640" cy="4816362"/>
+          </a:xfrm>
+          <a:prstGeom prst="rect">
+            <a:avLst/>
+          </a:prstGeom>
+        </p:spPr>
+      </p:pic>
     </p:spTree>
   </p:cSld>
   <p:clrMapOvr>

--- a/plans/ppt/TW-SELFSELECT台股買賣自動化系統-W5-講稿版.pptx
+++ b/plans/ppt/TW-SELFSELECT台股買賣自動化系統-W5-講稿版.pptx
@@ -19814,32 +19814,39 @@
               </a:tabLst>
             </a:pPr>
             <a:r>
+              <a:rPr/>
               <a:t>增加策略＝＞（先切到 plan 模式)</a:t>
             </a:r>
             <a:br/>
             <a:br/>
             <a:r>
+              <a:rPr/>
               <a:t>問：用g1備用2來完成以下KD策略: 週 KD 黃金交叉策略（最推薦來自Google AI推薦穩健的ＫＤ策略）: </a:t>
             </a:r>
             <a:br/>
             <a:br/>
             <a:r>
+              <a:rPr/>
               <a:t>放棄震盪劇烈的日線，改用 週 K 線（以週為單位計算）。</a:t>
             </a:r>
             <a:br/>
             <a:r>
+              <a:rPr/>
               <a:t> 週 KD 的轉折代表的是中長期（數個月到半年以上）的趨勢改變。 </a:t>
             </a:r>
             <a:br/>
             <a:r>
+              <a:rPr/>
               <a:t>買進點：當週 KD 在 低檔（小於 30 或 20）發生黃金交叉 時進場。這通常代表股價經歷大波段修正後，中長期底部成形。</a:t>
             </a:r>
             <a:br/>
             <a:r>
+              <a:rPr/>
               <a:t>持有期：只要週 KD 維持向上，或是維持在高檔鈍化，就一路抱牢。</a:t>
             </a:r>
             <a:br/>
             <a:r>
+              <a:rPr/>
               <a:t>好處：一年中一檔股票可能只會出現 1~2 次訊號，交易次數少，手續費低，且能抓到大波段波幅。</a:t>
             </a:r>
             <a:endParaRPr lang="en-US" sz="2800" b="1" u="none" strike="noStrike">
@@ -19942,6 +19949,7 @@
               </a:tabLst>
             </a:pPr>
             <a:r>
+              <a:rPr/>
               <a:t>計畫完成（plan 模式）</a:t>
             </a:r>
             <a:endParaRPr lang="en-US" sz="3200" b="1" u="none" strike="noStrike">
